--- a/ppt/AI01-Intro.pptx
+++ b/ppt/AI01-Intro.pptx
@@ -5,29 +5,30 @@
     <p:sldMasterId id="2147483653" r:id="rId1"/>
   </p:sldMasterIdLst>
   <p:notesMasterIdLst>
-    <p:notesMasterId r:id="rId19"/>
+    <p:notesMasterId r:id="rId20"/>
   </p:notesMasterIdLst>
   <p:handoutMasterIdLst>
-    <p:handoutMasterId r:id="rId20"/>
+    <p:handoutMasterId r:id="rId21"/>
   </p:handoutMasterIdLst>
   <p:sldIdLst>
     <p:sldId id="264" r:id="rId2"/>
     <p:sldId id="334" r:id="rId3"/>
-    <p:sldId id="308" r:id="rId4"/>
-    <p:sldId id="309" r:id="rId5"/>
-    <p:sldId id="286" r:id="rId6"/>
-    <p:sldId id="287" r:id="rId7"/>
-    <p:sldId id="259" r:id="rId8"/>
-    <p:sldId id="268" r:id="rId9"/>
-    <p:sldId id="269" r:id="rId10"/>
-    <p:sldId id="2562" r:id="rId11"/>
-    <p:sldId id="2568" r:id="rId12"/>
-    <p:sldId id="2570" r:id="rId13"/>
-    <p:sldId id="2573" r:id="rId14"/>
-    <p:sldId id="2576" r:id="rId15"/>
-    <p:sldId id="2579" r:id="rId16"/>
-    <p:sldId id="2582" r:id="rId17"/>
-    <p:sldId id="2584" r:id="rId18"/>
+    <p:sldId id="2585" r:id="rId4"/>
+    <p:sldId id="308" r:id="rId5"/>
+    <p:sldId id="309" r:id="rId6"/>
+    <p:sldId id="286" r:id="rId7"/>
+    <p:sldId id="287" r:id="rId8"/>
+    <p:sldId id="259" r:id="rId9"/>
+    <p:sldId id="268" r:id="rId10"/>
+    <p:sldId id="269" r:id="rId11"/>
+    <p:sldId id="2562" r:id="rId12"/>
+    <p:sldId id="2568" r:id="rId13"/>
+    <p:sldId id="2570" r:id="rId14"/>
+    <p:sldId id="2573" r:id="rId15"/>
+    <p:sldId id="2576" r:id="rId16"/>
+    <p:sldId id="2579" r:id="rId17"/>
+    <p:sldId id="2582" r:id="rId18"/>
+    <p:sldId id="2584" r:id="rId19"/>
   </p:sldIdLst>
   <p:sldSz cx="9144000" cy="6858000" type="screen4x3"/>
   <p:notesSz cx="6648450" cy="9782175"/>
@@ -163,6 +164,7 @@
           <p14:sldIdLst>
             <p14:sldId id="264"/>
             <p14:sldId id="334"/>
+            <p14:sldId id="2585"/>
             <p14:sldId id="308"/>
             <p14:sldId id="309"/>
             <p14:sldId id="286"/>
@@ -1105,7 +1107,7 @@
           <a:lstStyle/>
           <a:p>
             <a:fld id="{5B256BFB-95E8-4F75-A082-CD5C460CC240}" type="slidenum">
-              <a:t>16</a:t>
+              <a:t>17</a:t>
             </a:fld>
             <a:endParaRPr lang="fr-FR"/>
           </a:p>
@@ -1209,7 +1211,7 @@
           <a:lstStyle/>
           <a:p>
             <a:fld id="{5B256BFB-95E8-4F75-A082-CD5C460CC240}" type="slidenum">
-              <a:t>17</a:t>
+              <a:t>18</a:t>
             </a:fld>
             <a:endParaRPr lang="fr-FR"/>
           </a:p>
@@ -1450,7 +1452,7 @@
           <a:lstStyle/>
           <a:p>
             <a:fld id="{5B256BFB-95E8-4F75-A082-CD5C460CC240}" type="slidenum">
-              <a:t>10</a:t>
+              <a:t>11</a:t>
             </a:fld>
             <a:endParaRPr lang="fr-FR"/>
           </a:p>
@@ -1544,7 +1546,7 @@
           <a:lstStyle/>
           <a:p>
             <a:fld id="{5B256BFB-95E8-4F75-A082-CD5C460CC240}" type="slidenum">
-              <a:t>11</a:t>
+              <a:t>12</a:t>
             </a:fld>
             <a:endParaRPr lang="fr-FR"/>
           </a:p>
@@ -1638,7 +1640,7 @@
           <a:lstStyle/>
           <a:p>
             <a:fld id="{5B256BFB-95E8-4F75-A082-CD5C460CC240}" type="slidenum">
-              <a:t>12</a:t>
+              <a:t>13</a:t>
             </a:fld>
             <a:endParaRPr lang="fr-FR"/>
           </a:p>
@@ -1732,7 +1734,7 @@
           <a:lstStyle/>
           <a:p>
             <a:fld id="{5B256BFB-95E8-4F75-A082-CD5C460CC240}" type="slidenum">
-              <a:t>13</a:t>
+              <a:t>14</a:t>
             </a:fld>
             <a:endParaRPr lang="fr-FR"/>
           </a:p>
@@ -1826,7 +1828,7 @@
           <a:lstStyle/>
           <a:p>
             <a:fld id="{5B256BFB-95E8-4F75-A082-CD5C460CC240}" type="slidenum">
-              <a:t>14</a:t>
+              <a:t>15</a:t>
             </a:fld>
             <a:endParaRPr lang="fr-FR"/>
           </a:p>
@@ -1920,7 +1922,7 @@
           <a:lstStyle/>
           <a:p>
             <a:fld id="{5B256BFB-95E8-4F75-A082-CD5C460CC240}" type="slidenum">
-              <a:t>15</a:t>
+              <a:t>16</a:t>
             </a:fld>
             <a:endParaRPr lang="fr-FR"/>
           </a:p>
@@ -4831,6 +4833,208 @@
       </p:grpSpPr>
       <p:sp>
         <p:nvSpPr>
+          <p:cNvPr id="2" name="Title 1"/>
+          <p:cNvSpPr>
+            <a:spLocks noGrp="1"/>
+          </p:cNvSpPr>
+          <p:nvPr>
+            <p:ph type="title"/>
+          </p:nvPr>
+        </p:nvSpPr>
+        <p:spPr/>
+        <p:txBody>
+          <a:bodyPr/>
+          <a:lstStyle/>
+          <a:p>
+            <a:r>
+              <a:t>Limites, risques &amp; garde‑fous</a:t>
+            </a:r>
+          </a:p>
+        </p:txBody>
+      </p:sp>
+      <p:sp>
+        <p:nvSpPr>
+          <p:cNvPr id="3" name="Content Placeholder 2"/>
+          <p:cNvSpPr>
+            <a:spLocks noGrp="1"/>
+          </p:cNvSpPr>
+          <p:nvPr>
+            <p:ph idx="1"/>
+          </p:nvPr>
+        </p:nvSpPr>
+        <p:spPr/>
+        <p:txBody>
+          <a:bodyPr/>
+          <a:lstStyle/>
+          <a:p>
+            <a:r>
+              <a:rPr dirty="0" err="1"/>
+              <a:t>Dépendance</a:t>
+            </a:r>
+            <a:r>
+              <a:rPr dirty="0"/>
+              <a:t> aux données (</a:t>
+            </a:r>
+            <a:r>
+              <a:rPr dirty="0" err="1"/>
+              <a:t>qualité</a:t>
+            </a:r>
+            <a:r>
+              <a:rPr dirty="0"/>
+              <a:t>, </a:t>
+            </a:r>
+            <a:r>
+              <a:rPr dirty="0" err="1"/>
+              <a:t>biais</a:t>
+            </a:r>
+            <a:r>
+              <a:rPr dirty="0"/>
+              <a:t>, </a:t>
+            </a:r>
+            <a:r>
+              <a:rPr dirty="0" err="1"/>
+              <a:t>dérive</a:t>
+            </a:r>
+            <a:r>
+              <a:rPr dirty="0"/>
+              <a:t>)</a:t>
+            </a:r>
+          </a:p>
+          <a:p>
+            <a:r>
+              <a:rPr dirty="0" err="1"/>
+              <a:t>Robustesse</a:t>
+            </a:r>
+            <a:r>
+              <a:rPr dirty="0"/>
+              <a:t>, hallucinations, </a:t>
+            </a:r>
+            <a:r>
+              <a:rPr dirty="0" err="1"/>
+              <a:t>sécurité</a:t>
+            </a:r>
+            <a:r>
+              <a:rPr dirty="0"/>
+              <a:t> (adversarial)</a:t>
+            </a:r>
+          </a:p>
+          <a:p>
+            <a:r>
+              <a:rPr dirty="0" err="1"/>
+              <a:t>Explicabilité</a:t>
+            </a:r>
+            <a:r>
+              <a:rPr dirty="0"/>
+              <a:t>, </a:t>
+            </a:r>
+            <a:r>
+              <a:rPr dirty="0" err="1"/>
+              <a:t>auditabilité</a:t>
+            </a:r>
+            <a:r>
+              <a:rPr dirty="0"/>
+              <a:t>, </a:t>
+            </a:r>
+            <a:r>
+              <a:rPr dirty="0" err="1"/>
+              <a:t>conformité</a:t>
+            </a:r>
+            <a:r>
+              <a:rPr dirty="0"/>
+              <a:t> (RGPD</a:t>
+            </a:r>
+            <a:r>
+              <a:rPr lang="fr-FR" dirty="0"/>
+              <a:t>, AI </a:t>
+            </a:r>
+            <a:r>
+              <a:rPr lang="fr-FR" dirty="0" err="1"/>
+              <a:t>Act</a:t>
+            </a:r>
+            <a:r>
+              <a:rPr dirty="0"/>
+              <a:t>)</a:t>
+            </a:r>
+          </a:p>
+          <a:p>
+            <a:r>
+              <a:rPr dirty="0"/>
+              <a:t>Impact </a:t>
+            </a:r>
+            <a:r>
+              <a:rPr dirty="0" err="1"/>
+              <a:t>environnemental</a:t>
+            </a:r>
+            <a:r>
+              <a:rPr dirty="0"/>
+              <a:t> et </a:t>
+            </a:r>
+            <a:r>
+              <a:rPr dirty="0" err="1"/>
+              <a:t>coûts</a:t>
+            </a:r>
+            <a:endParaRPr dirty="0"/>
+          </a:p>
+          <a:p>
+            <a:r>
+              <a:rPr dirty="0" err="1"/>
+              <a:t>Risques</a:t>
+            </a:r>
+            <a:r>
+              <a:rPr dirty="0"/>
+              <a:t> </a:t>
+            </a:r>
+            <a:r>
+              <a:rPr dirty="0" err="1"/>
+              <a:t>organisationnels</a:t>
+            </a:r>
+            <a:r>
+              <a:rPr dirty="0"/>
+              <a:t> : adoption, </a:t>
+            </a:r>
+            <a:r>
+              <a:rPr dirty="0" err="1"/>
+              <a:t>compétences</a:t>
+            </a:r>
+            <a:r>
+              <a:rPr dirty="0"/>
+              <a:t>, </a:t>
+            </a:r>
+            <a:r>
+              <a:rPr dirty="0" err="1"/>
+              <a:t>éthique</a:t>
+            </a:r>
+            <a:endParaRPr dirty="0"/>
+          </a:p>
+        </p:txBody>
+      </p:sp>
+    </p:spTree>
+  </p:cSld>
+  <p:clrMapOvr>
+    <a:masterClrMapping/>
+  </p:clrMapOvr>
+</p:sld>
+</file>
+
+<file path=ppt/slides/slide11.xml><?xml version="1.0" encoding="utf-8"?>
+<p:sld xmlns:a="http://schemas.openxmlformats.org/drawingml/2006/main" xmlns:r="http://schemas.openxmlformats.org/officeDocument/2006/relationships" xmlns:p="http://schemas.openxmlformats.org/presentationml/2006/main">
+  <p:cSld>
+    <p:spTree>
+      <p:nvGrpSpPr>
+        <p:cNvPr id="1" name=""/>
+        <p:cNvGrpSpPr/>
+        <p:nvPr/>
+      </p:nvGrpSpPr>
+      <p:grpSpPr>
+        <a:xfrm>
+          <a:off x="0" y="0"/>
+          <a:ext cx="0" cy="0"/>
+          <a:chOff x="0" y="0"/>
+          <a:chExt cx="0" cy="0"/>
+        </a:xfrm>
+      </p:grpSpPr>
+      <p:sp>
+        <p:nvSpPr>
           <p:cNvPr id="2" name="Titre 1">
             <a:extLst>
               <a:ext uri="{FF2B5EF4-FFF2-40B4-BE49-F238E27FC236}">
@@ -5126,7 +5330,7 @@
 </p:sld>
 </file>
 
-<file path=ppt/slides/slide11.xml><?xml version="1.0" encoding="utf-8"?>
+<file path=ppt/slides/slide12.xml><?xml version="1.0" encoding="utf-8"?>
 <p:sld xmlns:a="http://schemas.openxmlformats.org/drawingml/2006/main" xmlns:r="http://schemas.openxmlformats.org/officeDocument/2006/relationships" xmlns:p="http://schemas.openxmlformats.org/presentationml/2006/main">
   <p:cSld>
     <p:spTree>
@@ -5793,7 +5997,7 @@
 </p:sld>
 </file>
 
-<file path=ppt/slides/slide12.xml><?xml version="1.0" encoding="utf-8"?>
+<file path=ppt/slides/slide13.xml><?xml version="1.0" encoding="utf-8"?>
 <p:sld xmlns:a="http://schemas.openxmlformats.org/drawingml/2006/main" xmlns:r="http://schemas.openxmlformats.org/officeDocument/2006/relationships" xmlns:p="http://schemas.openxmlformats.org/presentationml/2006/main">
   <p:cSld>
     <p:spTree>
@@ -6288,7 +6492,7 @@
 </p:sld>
 </file>
 
-<file path=ppt/slides/slide13.xml><?xml version="1.0" encoding="utf-8"?>
+<file path=ppt/slides/slide14.xml><?xml version="1.0" encoding="utf-8"?>
 <p:sld xmlns:a="http://schemas.openxmlformats.org/drawingml/2006/main" xmlns:r="http://schemas.openxmlformats.org/officeDocument/2006/relationships" xmlns:p="http://schemas.openxmlformats.org/presentationml/2006/main">
   <p:cSld>
     <p:spTree>
@@ -6776,7 +6980,7 @@
 </p:sld>
 </file>
 
-<file path=ppt/slides/slide14.xml><?xml version="1.0" encoding="utf-8"?>
+<file path=ppt/slides/slide15.xml><?xml version="1.0" encoding="utf-8"?>
 <p:sld xmlns:a="http://schemas.openxmlformats.org/drawingml/2006/main" xmlns:r="http://schemas.openxmlformats.org/officeDocument/2006/relationships" xmlns:p="http://schemas.openxmlformats.org/presentationml/2006/main">
   <p:cSld>
     <p:spTree>
@@ -7255,7 +7459,7 @@
 </p:sld>
 </file>
 
-<file path=ppt/slides/slide15.xml><?xml version="1.0" encoding="utf-8"?>
+<file path=ppt/slides/slide16.xml><?xml version="1.0" encoding="utf-8"?>
 <p:sld xmlns:a="http://schemas.openxmlformats.org/drawingml/2006/main" xmlns:r="http://schemas.openxmlformats.org/officeDocument/2006/relationships" xmlns:p="http://schemas.openxmlformats.org/presentationml/2006/main">
   <p:cSld>
     <p:spTree>
@@ -7744,7 +7948,7 @@
 </p:sld>
 </file>
 
-<file path=ppt/slides/slide16.xml><?xml version="1.0" encoding="utf-8"?>
+<file path=ppt/slides/slide17.xml><?xml version="1.0" encoding="utf-8"?>
 <p:sld xmlns:a="http://schemas.openxmlformats.org/drawingml/2006/main" xmlns:r="http://schemas.openxmlformats.org/officeDocument/2006/relationships" xmlns:p="http://schemas.openxmlformats.org/presentationml/2006/main">
   <p:cSld>
     <p:spTree>
@@ -8251,7 +8455,7 @@
 </p:sld>
 </file>
 
-<file path=ppt/slides/slide17.xml><?xml version="1.0" encoding="utf-8"?>
+<file path=ppt/slides/slide18.xml><?xml version="1.0" encoding="utf-8"?>
 <p:sld xmlns:a="http://schemas.openxmlformats.org/drawingml/2006/main" xmlns:r="http://schemas.openxmlformats.org/officeDocument/2006/relationships" xmlns:p="http://schemas.openxmlformats.org/presentationml/2006/main">
   <p:cSld>
     <p:spTree>
@@ -8668,6 +8872,389 @@
       </p:grpSpPr>
       <p:sp>
         <p:nvSpPr>
+          <p:cNvPr id="2" name="Titre 1">
+            <a:extLst>
+              <a:ext uri="{FF2B5EF4-FFF2-40B4-BE49-F238E27FC236}">
+                <a16:creationId xmlns:a16="http://schemas.microsoft.com/office/drawing/2014/main" id="{106F2E89-3F71-9175-97A0-90C4D1BE6749}"/>
+              </a:ext>
+            </a:extLst>
+          </p:cNvPr>
+          <p:cNvSpPr>
+            <a:spLocks noGrp="1"/>
+          </p:cNvSpPr>
+          <p:nvPr>
+            <p:ph type="title"/>
+          </p:nvPr>
+        </p:nvSpPr>
+        <p:spPr/>
+        <p:txBody>
+          <a:bodyPr/>
+          <a:lstStyle/>
+          <a:p>
+            <a:r>
+              <a:rPr lang="fr-FR" dirty="0"/>
+              <a:t>Types d'IA ?</a:t>
+            </a:r>
+          </a:p>
+        </p:txBody>
+      </p:sp>
+      <p:sp>
+        <p:nvSpPr>
+          <p:cNvPr id="3" name="Espace réservé du contenu 2">
+            <a:extLst>
+              <a:ext uri="{FF2B5EF4-FFF2-40B4-BE49-F238E27FC236}">
+                <a16:creationId xmlns:a16="http://schemas.microsoft.com/office/drawing/2014/main" id="{FCCC3D28-BB2A-5E0E-A02D-C15FACAAB28E}"/>
+              </a:ext>
+            </a:extLst>
+          </p:cNvPr>
+          <p:cNvSpPr>
+            <a:spLocks noGrp="1"/>
+          </p:cNvSpPr>
+          <p:nvPr>
+            <p:ph idx="1"/>
+          </p:nvPr>
+        </p:nvSpPr>
+        <p:spPr>
+          <a:xfrm>
+            <a:off x="179513" y="1412776"/>
+            <a:ext cx="4752528" cy="5040560"/>
+          </a:xfrm>
+        </p:spPr>
+        <p:txBody>
+          <a:bodyPr/>
+          <a:lstStyle/>
+          <a:p>
+            <a:r>
+              <a:rPr lang="fr-FR" sz="2400" dirty="0"/>
+              <a:t>Génératives</a:t>
+            </a:r>
+          </a:p>
+          <a:p>
+            <a:pPr lvl="1"/>
+            <a:r>
+              <a:rPr lang="fr-FR" sz="2000" dirty="0"/>
+              <a:t>LLM</a:t>
+            </a:r>
+          </a:p>
+          <a:p>
+            <a:r>
+              <a:rPr lang="fr-FR" sz="2400" dirty="0"/>
+              <a:t>Prédictives</a:t>
+            </a:r>
+          </a:p>
+          <a:p>
+            <a:pPr lvl="1"/>
+            <a:r>
+              <a:rPr lang="fr-FR" sz="2000" dirty="0"/>
+              <a:t>Réseaux de neurones</a:t>
+            </a:r>
+          </a:p>
+          <a:p>
+            <a:pPr lvl="1"/>
+            <a:r>
+              <a:rPr lang="fr-FR" sz="2000" dirty="0"/>
+              <a:t>Deep Learning</a:t>
+            </a:r>
+          </a:p>
+          <a:p>
+            <a:r>
+              <a:rPr lang="fr-FR" sz="2400" dirty="0"/>
+              <a:t>Systèmes experts</a:t>
+            </a:r>
+          </a:p>
+          <a:p>
+            <a:r>
+              <a:rPr lang="fr-FR" sz="2400" dirty="0"/>
+              <a:t>Besoins</a:t>
+            </a:r>
+          </a:p>
+          <a:p>
+            <a:pPr lvl="1"/>
+            <a:r>
+              <a:rPr lang="fr-FR" sz="2000" dirty="0"/>
+              <a:t>Agents</a:t>
+            </a:r>
+          </a:p>
+          <a:p>
+            <a:pPr lvl="1"/>
+            <a:r>
+              <a:rPr lang="fr-FR" sz="2000" dirty="0"/>
+              <a:t>Vision</a:t>
+            </a:r>
+          </a:p>
+          <a:p>
+            <a:pPr lvl="1"/>
+            <a:r>
+              <a:rPr lang="fr-FR" sz="2000" dirty="0" err="1"/>
+              <a:t>ChatBot</a:t>
+            </a:r>
+            <a:endParaRPr lang="fr-FR" sz="2000" dirty="0"/>
+          </a:p>
+          <a:p>
+            <a:r>
+              <a:rPr lang="fr-FR" sz="2400" dirty="0"/>
+              <a:t>Marques</a:t>
+            </a:r>
+          </a:p>
+          <a:p>
+            <a:pPr lvl="1"/>
+            <a:r>
+              <a:rPr lang="fr-FR" sz="2000" dirty="0" err="1"/>
+              <a:t>OpenClaw</a:t>
+            </a:r>
+            <a:r>
+              <a:rPr lang="fr-FR" sz="2000" dirty="0"/>
+              <a:t> </a:t>
+            </a:r>
+            <a:r>
+              <a:rPr lang="fr-FR" sz="2000" dirty="0" err="1"/>
+              <a:t>Athropic</a:t>
+            </a:r>
+            <a:r>
+              <a:rPr lang="fr-FR" sz="2000" dirty="0"/>
+              <a:t> MCP</a:t>
+            </a:r>
+          </a:p>
+          <a:p>
+            <a:pPr marL="0" indent="0">
+              <a:buNone/>
+            </a:pPr>
+            <a:endParaRPr lang="fr-FR" sz="2400" dirty="0"/>
+          </a:p>
+        </p:txBody>
+      </p:sp>
+      <p:sp>
+        <p:nvSpPr>
+          <p:cNvPr id="4" name="Espace réservé du contenu 2">
+            <a:extLst>
+              <a:ext uri="{FF2B5EF4-FFF2-40B4-BE49-F238E27FC236}">
+                <a16:creationId xmlns:a16="http://schemas.microsoft.com/office/drawing/2014/main" id="{44B87332-08B5-DB9C-F4DA-EEF6762AFC5F}"/>
+              </a:ext>
+            </a:extLst>
+          </p:cNvPr>
+          <p:cNvSpPr txBox="1">
+            <a:spLocks/>
+          </p:cNvSpPr>
+          <p:nvPr/>
+        </p:nvSpPr>
+        <p:spPr bwMode="auto">
+          <a:xfrm>
+            <a:off x="4265043" y="1412776"/>
+            <a:ext cx="4752528" cy="5040560"/>
+          </a:xfrm>
+          <a:prstGeom prst="rect">
+            <a:avLst/>
+          </a:prstGeom>
+          <a:noFill/>
+          <a:ln>
+            <a:noFill/>
+          </a:ln>
+          <a:extLst>
+            <a:ext uri="{909E8E84-426E-40DD-AFC4-6F175D3DCCD1}">
+              <a14:hiddenFill xmlns:a14="http://schemas.microsoft.com/office/drawing/2010/main">
+                <a:solidFill>
+                  <a:srgbClr val="FFFFFF"/>
+                </a:solidFill>
+              </a14:hiddenFill>
+            </a:ext>
+            <a:ext uri="{91240B29-F687-4F45-9708-019B960494DF}">
+              <a14:hiddenLine xmlns:a14="http://schemas.microsoft.com/office/drawing/2010/main" w="9525">
+                <a:solidFill>
+                  <a:srgbClr val="000000"/>
+                </a:solidFill>
+                <a:miter lim="800000"/>
+                <a:headEnd/>
+                <a:tailEnd/>
+              </a14:hiddenLine>
+            </a:ext>
+          </a:extLst>
+        </p:spPr>
+        <p:txBody>
+          <a:bodyPr vert="horz" wrap="square" lIns="91440" tIns="45720" rIns="91440" bIns="45720" numCol="1" anchor="t" anchorCtr="0" compatLnSpc="1">
+            <a:prstTxWarp prst="textNoShape">
+              <a:avLst/>
+            </a:prstTxWarp>
+          </a:bodyPr>
+          <a:lstStyle>
+            <a:lvl1pPr marL="342900" indent="-342900" algn="l" rtl="0" eaLnBrk="0" fontAlgn="base" hangingPunct="0">
+              <a:spcBef>
+                <a:spcPct val="20000"/>
+              </a:spcBef>
+              <a:spcAft>
+                <a:spcPct val="0"/>
+              </a:spcAft>
+              <a:buClr>
+                <a:schemeClr val="tx1"/>
+              </a:buClr>
+              <a:buFont typeface="Monotype Sorts" pitchFamily="2" charset="2"/>
+              <a:buChar char="o"/>
+              <a:defRPr sz="2800">
+                <a:solidFill>
+                  <a:schemeClr val="tx1"/>
+                </a:solidFill>
+                <a:latin typeface="+mn-lt"/>
+                <a:ea typeface="+mn-ea"/>
+                <a:cs typeface="+mn-cs"/>
+              </a:defRPr>
+            </a:lvl1pPr>
+            <a:lvl2pPr marL="742950" indent="-285750" algn="l" rtl="0" eaLnBrk="0" fontAlgn="base" hangingPunct="0">
+              <a:spcBef>
+                <a:spcPct val="20000"/>
+              </a:spcBef>
+              <a:spcAft>
+                <a:spcPct val="0"/>
+              </a:spcAft>
+              <a:buChar char="–"/>
+              <a:defRPr sz="2400">
+                <a:solidFill>
+                  <a:schemeClr val="tx1"/>
+                </a:solidFill>
+                <a:latin typeface="+mn-lt"/>
+              </a:defRPr>
+            </a:lvl2pPr>
+            <a:lvl3pPr marL="1143000" indent="-228600" algn="l" rtl="0" eaLnBrk="0" fontAlgn="base" hangingPunct="0">
+              <a:spcBef>
+                <a:spcPct val="20000"/>
+              </a:spcBef>
+              <a:spcAft>
+                <a:spcPct val="0"/>
+              </a:spcAft>
+              <a:buChar char="•"/>
+              <a:defRPr sz="2000">
+                <a:solidFill>
+                  <a:schemeClr val="tx1"/>
+                </a:solidFill>
+                <a:latin typeface="+mn-lt"/>
+              </a:defRPr>
+            </a:lvl3pPr>
+            <a:lvl4pPr marL="1600200" indent="-228600" algn="l" rtl="0" eaLnBrk="0" fontAlgn="base" hangingPunct="0">
+              <a:spcBef>
+                <a:spcPct val="20000"/>
+              </a:spcBef>
+              <a:spcAft>
+                <a:spcPct val="0"/>
+              </a:spcAft>
+              <a:buChar char="–"/>
+              <a:defRPr>
+                <a:solidFill>
+                  <a:schemeClr val="tx1"/>
+                </a:solidFill>
+                <a:latin typeface="+mn-lt"/>
+              </a:defRPr>
+            </a:lvl4pPr>
+            <a:lvl5pPr marL="2057400" indent="-228600" algn="l" rtl="0" eaLnBrk="0" fontAlgn="base" hangingPunct="0">
+              <a:spcBef>
+                <a:spcPct val="20000"/>
+              </a:spcBef>
+              <a:spcAft>
+                <a:spcPct val="0"/>
+              </a:spcAft>
+              <a:buChar char="»"/>
+              <a:defRPr sz="1600">
+                <a:solidFill>
+                  <a:schemeClr val="tx1"/>
+                </a:solidFill>
+                <a:latin typeface="+mn-lt"/>
+              </a:defRPr>
+            </a:lvl5pPr>
+            <a:lvl6pPr marL="2514600" indent="-228600" algn="l" rtl="0" fontAlgn="base">
+              <a:spcBef>
+                <a:spcPct val="20000"/>
+              </a:spcBef>
+              <a:spcAft>
+                <a:spcPct val="0"/>
+              </a:spcAft>
+              <a:buChar char="»"/>
+              <a:defRPr sz="1600">
+                <a:solidFill>
+                  <a:schemeClr val="tx1"/>
+                </a:solidFill>
+                <a:latin typeface="+mn-lt"/>
+              </a:defRPr>
+            </a:lvl6pPr>
+            <a:lvl7pPr marL="2971800" indent="-228600" algn="l" rtl="0" fontAlgn="base">
+              <a:spcBef>
+                <a:spcPct val="20000"/>
+              </a:spcBef>
+              <a:spcAft>
+                <a:spcPct val="0"/>
+              </a:spcAft>
+              <a:buChar char="»"/>
+              <a:defRPr sz="1600">
+                <a:solidFill>
+                  <a:schemeClr val="tx1"/>
+                </a:solidFill>
+                <a:latin typeface="+mn-lt"/>
+              </a:defRPr>
+            </a:lvl7pPr>
+            <a:lvl8pPr marL="3429000" indent="-228600" algn="l" rtl="0" fontAlgn="base">
+              <a:spcBef>
+                <a:spcPct val="20000"/>
+              </a:spcBef>
+              <a:spcAft>
+                <a:spcPct val="0"/>
+              </a:spcAft>
+              <a:buChar char="»"/>
+              <a:defRPr sz="1600">
+                <a:solidFill>
+                  <a:schemeClr val="tx1"/>
+                </a:solidFill>
+                <a:latin typeface="+mn-lt"/>
+              </a:defRPr>
+            </a:lvl8pPr>
+            <a:lvl9pPr marL="3886200" indent="-228600" algn="l" rtl="0" fontAlgn="base">
+              <a:spcBef>
+                <a:spcPct val="20000"/>
+              </a:spcBef>
+              <a:spcAft>
+                <a:spcPct val="0"/>
+              </a:spcAft>
+              <a:buChar char="»"/>
+              <a:defRPr sz="1600">
+                <a:solidFill>
+                  <a:schemeClr val="tx1"/>
+                </a:solidFill>
+                <a:latin typeface="+mn-lt"/>
+              </a:defRPr>
+            </a:lvl9pPr>
+          </a:lstStyle>
+          <a:p>
+            <a:endParaRPr lang="fr-FR" kern="0" dirty="0"/>
+          </a:p>
+        </p:txBody>
+      </p:sp>
+    </p:spTree>
+    <p:extLst>
+      <p:ext uri="{BB962C8B-B14F-4D97-AF65-F5344CB8AC3E}">
+        <p14:creationId xmlns:p14="http://schemas.microsoft.com/office/powerpoint/2010/main" val="315992123"/>
+      </p:ext>
+    </p:extLst>
+  </p:cSld>
+  <p:clrMapOvr>
+    <a:masterClrMapping/>
+  </p:clrMapOvr>
+</p:sld>
+</file>
+
+<file path=ppt/slides/slide4.xml><?xml version="1.0" encoding="utf-8"?>
+<p:sld xmlns:a="http://schemas.openxmlformats.org/drawingml/2006/main" xmlns:r="http://schemas.openxmlformats.org/officeDocument/2006/relationships" xmlns:p="http://schemas.openxmlformats.org/presentationml/2006/main">
+  <p:cSld>
+    <p:spTree>
+      <p:nvGrpSpPr>
+        <p:cNvPr id="1" name=""/>
+        <p:cNvGrpSpPr/>
+        <p:nvPr/>
+      </p:nvGrpSpPr>
+      <p:grpSpPr>
+        <a:xfrm>
+          <a:off x="0" y="0"/>
+          <a:ext cx="0" cy="0"/>
+          <a:chOff x="0" y="0"/>
+          <a:chExt cx="0" cy="0"/>
+        </a:xfrm>
+      </p:grpSpPr>
+      <p:sp>
+        <p:nvSpPr>
           <p:cNvPr id="2" name="Titre 1"/>
           <p:cNvSpPr>
             <a:spLocks noGrp="1"/>
@@ -8861,7 +9448,7 @@
 </p:sld>
 </file>
 
-<file path=ppt/slides/slide4.xml><?xml version="1.0" encoding="utf-8"?>
+<file path=ppt/slides/slide5.xml><?xml version="1.0" encoding="utf-8"?>
 <p:sld xmlns:a="http://schemas.openxmlformats.org/drawingml/2006/main" xmlns:r="http://schemas.openxmlformats.org/officeDocument/2006/relationships" xmlns:p="http://schemas.openxmlformats.org/presentationml/2006/main">
   <p:cSld>
     <p:spTree>
@@ -8970,7 +9557,7 @@
 </p:sld>
 </file>
 
-<file path=ppt/slides/slide5.xml><?xml version="1.0" encoding="utf-8"?>
+<file path=ppt/slides/slide6.xml><?xml version="1.0" encoding="utf-8"?>
 <p:sld xmlns:a="http://schemas.openxmlformats.org/drawingml/2006/main" xmlns:r="http://schemas.openxmlformats.org/officeDocument/2006/relationships" xmlns:p="http://schemas.openxmlformats.org/presentationml/2006/main">
   <p:cSld>
     <p:spTree>
@@ -9090,7 +9677,7 @@
 </p:sld>
 </file>
 
-<file path=ppt/slides/slide6.xml><?xml version="1.0" encoding="utf-8"?>
+<file path=ppt/slides/slide7.xml><?xml version="1.0" encoding="utf-8"?>
 <p:sld xmlns:a="http://schemas.openxmlformats.org/drawingml/2006/main" xmlns:r="http://schemas.openxmlformats.org/officeDocument/2006/relationships" xmlns:p="http://schemas.openxmlformats.org/presentationml/2006/main">
   <p:cSld>
     <p:spTree>
@@ -9224,174 +9811,6 @@
 </p:sld>
 </file>
 
-<file path=ppt/slides/slide7.xml><?xml version="1.0" encoding="utf-8"?>
-<p:sld xmlns:a="http://schemas.openxmlformats.org/drawingml/2006/main" xmlns:r="http://schemas.openxmlformats.org/officeDocument/2006/relationships" xmlns:p="http://schemas.openxmlformats.org/presentationml/2006/main">
-  <p:cSld>
-    <p:spTree>
-      <p:nvGrpSpPr>
-        <p:cNvPr id="1" name=""/>
-        <p:cNvGrpSpPr/>
-        <p:nvPr/>
-      </p:nvGrpSpPr>
-      <p:grpSpPr>
-        <a:xfrm>
-          <a:off x="0" y="0"/>
-          <a:ext cx="0" cy="0"/>
-          <a:chOff x="0" y="0"/>
-          <a:chExt cx="0" cy="0"/>
-        </a:xfrm>
-      </p:grpSpPr>
-      <p:sp>
-        <p:nvSpPr>
-          <p:cNvPr id="2" name="Title 1"/>
-          <p:cNvSpPr>
-            <a:spLocks noGrp="1"/>
-          </p:cNvSpPr>
-          <p:nvPr>
-            <p:ph type="title"/>
-          </p:nvPr>
-        </p:nvSpPr>
-        <p:spPr/>
-        <p:txBody>
-          <a:bodyPr/>
-          <a:lstStyle/>
-          <a:p>
-            <a:r>
-              <a:t>Qu'est-ce que l'IA ?</a:t>
-            </a:r>
-          </a:p>
-        </p:txBody>
-      </p:sp>
-      <p:sp>
-        <p:nvSpPr>
-          <p:cNvPr id="3" name="Content Placeholder 2"/>
-          <p:cNvSpPr>
-            <a:spLocks noGrp="1"/>
-          </p:cNvSpPr>
-          <p:nvPr>
-            <p:ph idx="1"/>
-          </p:nvPr>
-        </p:nvSpPr>
-        <p:spPr/>
-        <p:txBody>
-          <a:bodyPr/>
-          <a:lstStyle/>
-          <a:p>
-            <a:r>
-              <a:rPr dirty="0"/>
-              <a:t>Discipline </a:t>
-            </a:r>
-            <a:r>
-              <a:rPr dirty="0" err="1"/>
-              <a:t>visant</a:t>
-            </a:r>
-            <a:r>
-              <a:rPr dirty="0"/>
-              <a:t> à </a:t>
-            </a:r>
-            <a:r>
-              <a:rPr dirty="0" err="1"/>
-              <a:t>reproduire</a:t>
-            </a:r>
-            <a:r>
-              <a:rPr dirty="0"/>
-              <a:t> </a:t>
-            </a:r>
-            <a:r>
-              <a:rPr dirty="0" err="1"/>
-              <a:t>ou</a:t>
-            </a:r>
-            <a:r>
-              <a:rPr dirty="0"/>
-              <a:t> augmenter des </a:t>
-            </a:r>
-            <a:r>
-              <a:rPr dirty="0" err="1"/>
-              <a:t>capacités</a:t>
-            </a:r>
-            <a:r>
-              <a:rPr dirty="0"/>
-              <a:t> </a:t>
-            </a:r>
-            <a:r>
-              <a:rPr dirty="0" err="1"/>
-              <a:t>cognitives</a:t>
-            </a:r>
-            <a:endParaRPr dirty="0"/>
-          </a:p>
-          <a:p>
-            <a:r>
-              <a:rPr dirty="0"/>
-              <a:t>Sous‑</a:t>
-            </a:r>
-            <a:r>
-              <a:rPr dirty="0" err="1"/>
-              <a:t>domaines</a:t>
-            </a:r>
-            <a:endParaRPr lang="fr-FR" dirty="0"/>
-          </a:p>
-          <a:p>
-            <a:pPr lvl="1"/>
-            <a:r>
-              <a:rPr lang="fr-FR" dirty="0"/>
-              <a:t>R</a:t>
-            </a:r>
-            <a:r>
-              <a:rPr dirty="0" err="1"/>
-              <a:t>aisonnement</a:t>
-            </a:r>
-            <a:r>
-              <a:rPr dirty="0"/>
-              <a:t> </a:t>
-            </a:r>
-            <a:r>
-              <a:rPr dirty="0" err="1"/>
-              <a:t>symbolique</a:t>
-            </a:r>
-            <a:endParaRPr lang="fr-FR" dirty="0"/>
-          </a:p>
-          <a:p>
-            <a:pPr lvl="1"/>
-            <a:r>
-              <a:rPr lang="fr-FR" dirty="0"/>
-              <a:t>Machine Learning</a:t>
-            </a:r>
-          </a:p>
-          <a:p>
-            <a:pPr lvl="1"/>
-            <a:r>
-              <a:rPr lang="fr-FR" dirty="0"/>
-              <a:t>Deep Learning</a:t>
-            </a:r>
-          </a:p>
-          <a:p>
-            <a:pPr lvl="1"/>
-            <a:r>
-              <a:rPr lang="fr-FR" dirty="0"/>
-              <a:t>Large </a:t>
-            </a:r>
-            <a:r>
-              <a:rPr lang="fr-FR" dirty="0" err="1"/>
-              <a:t>Language</a:t>
-            </a:r>
-            <a:r>
-              <a:rPr lang="fr-FR" dirty="0"/>
-              <a:t> Model</a:t>
-            </a:r>
-          </a:p>
-          <a:p>
-            <a:endParaRPr dirty="0"/>
-          </a:p>
-        </p:txBody>
-      </p:sp>
-    </p:spTree>
-  </p:cSld>
-  <p:clrMapOvr>
-    <a:masterClrMapping/>
-  </p:clrMapOvr>
-</p:sld>
-</file>
-
 <file path=ppt/slides/slide8.xml><?xml version="1.0" encoding="utf-8"?>
 <p:sld xmlns:a="http://schemas.openxmlformats.org/drawingml/2006/main" xmlns:r="http://schemas.openxmlformats.org/officeDocument/2006/relationships" xmlns:p="http://schemas.openxmlformats.org/presentationml/2006/main">
   <p:cSld>
@@ -9425,7 +9844,7 @@
           <a:lstStyle/>
           <a:p>
             <a:r>
-              <a:t>Potentiels de l'IA</a:t>
+              <a:t>Qu'est-ce que l'IA ?</a:t>
             </a:r>
           </a:p>
         </p:txBody>
@@ -9446,28 +9865,109 @@
           <a:lstStyle/>
           <a:p>
             <a:r>
-              <a:t>Vision par ordinateur : détection, OCR, inspection</a:t>
-            </a:r>
-          </a:p>
-          <a:p>
-            <a:r>
-              <a:t>Traitement du langage : résumé, recherche sémantique, assistants</a:t>
-            </a:r>
-          </a:p>
-          <a:p>
-            <a:r>
-              <a:t>Personnalisation &amp; recommandation</a:t>
-            </a:r>
-          </a:p>
-          <a:p>
-            <a:r>
-              <a:t>Optimisation industrielle &amp; maintenance prédictive</a:t>
-            </a:r>
-          </a:p>
-          <a:p>
-            <a:r>
-              <a:t>Aide à la décision &amp; automatisation de processus</a:t>
-            </a:r>
+              <a:rPr dirty="0"/>
+              <a:t>Discipline </a:t>
+            </a:r>
+            <a:r>
+              <a:rPr dirty="0" err="1"/>
+              <a:t>visant</a:t>
+            </a:r>
+            <a:r>
+              <a:rPr dirty="0"/>
+              <a:t> à </a:t>
+            </a:r>
+            <a:r>
+              <a:rPr dirty="0" err="1"/>
+              <a:t>reproduire</a:t>
+            </a:r>
+            <a:r>
+              <a:rPr dirty="0"/>
+              <a:t> </a:t>
+            </a:r>
+            <a:r>
+              <a:rPr dirty="0" err="1"/>
+              <a:t>ou</a:t>
+            </a:r>
+            <a:r>
+              <a:rPr dirty="0"/>
+              <a:t> augmenter des </a:t>
+            </a:r>
+            <a:r>
+              <a:rPr dirty="0" err="1"/>
+              <a:t>capacités</a:t>
+            </a:r>
+            <a:r>
+              <a:rPr dirty="0"/>
+              <a:t> </a:t>
+            </a:r>
+            <a:r>
+              <a:rPr dirty="0" err="1"/>
+              <a:t>cognitives</a:t>
+            </a:r>
+            <a:endParaRPr dirty="0"/>
+          </a:p>
+          <a:p>
+            <a:r>
+              <a:rPr dirty="0"/>
+              <a:t>Sous‑</a:t>
+            </a:r>
+            <a:r>
+              <a:rPr dirty="0" err="1"/>
+              <a:t>domaines</a:t>
+            </a:r>
+            <a:endParaRPr lang="fr-FR" dirty="0"/>
+          </a:p>
+          <a:p>
+            <a:pPr lvl="1"/>
+            <a:r>
+              <a:rPr lang="fr-FR" dirty="0"/>
+              <a:t>R</a:t>
+            </a:r>
+            <a:r>
+              <a:rPr dirty="0" err="1"/>
+              <a:t>aisonnement</a:t>
+            </a:r>
+            <a:r>
+              <a:rPr dirty="0"/>
+              <a:t> </a:t>
+            </a:r>
+            <a:r>
+              <a:rPr dirty="0" err="1"/>
+              <a:t>symbolique</a:t>
+            </a:r>
+            <a:endParaRPr lang="fr-FR" dirty="0"/>
+          </a:p>
+          <a:p>
+            <a:pPr lvl="1"/>
+            <a:r>
+              <a:rPr lang="fr-FR" dirty="0"/>
+              <a:t>Machine Learning</a:t>
+            </a:r>
+          </a:p>
+          <a:p>
+            <a:pPr lvl="1"/>
+            <a:r>
+              <a:rPr lang="fr-FR" dirty="0"/>
+              <a:t>Deep Learning</a:t>
+            </a:r>
+          </a:p>
+          <a:p>
+            <a:pPr lvl="1"/>
+            <a:r>
+              <a:rPr lang="fr-FR" dirty="0"/>
+              <a:t>Large </a:t>
+            </a:r>
+            <a:r>
+              <a:rPr lang="fr-FR" dirty="0" err="1"/>
+              <a:t>Language</a:t>
+            </a:r>
+            <a:r>
+              <a:rPr lang="fr-FR" dirty="0"/>
+              <a:t> Model</a:t>
+            </a:r>
+          </a:p>
+          <a:p>
+            <a:endParaRPr dirty="0"/>
           </a:p>
         </p:txBody>
       </p:sp>
@@ -9512,7 +10012,7 @@
           <a:lstStyle/>
           <a:p>
             <a:r>
-              <a:t>Limites, risques &amp; garde‑fous</a:t>
+              <a:t>Potentiels de l'IA</a:t>
             </a:r>
           </a:p>
         </p:txBody>
@@ -9533,143 +10033,28 @@
           <a:lstStyle/>
           <a:p>
             <a:r>
-              <a:rPr dirty="0" err="1"/>
-              <a:t>Dépendance</a:t>
-            </a:r>
-            <a:r>
-              <a:rPr dirty="0"/>
-              <a:t> aux données (</a:t>
-            </a:r>
-            <a:r>
-              <a:rPr dirty="0" err="1"/>
-              <a:t>qualité</a:t>
-            </a:r>
-            <a:r>
-              <a:rPr dirty="0"/>
-              <a:t>, </a:t>
-            </a:r>
-            <a:r>
-              <a:rPr dirty="0" err="1"/>
-              <a:t>biais</a:t>
-            </a:r>
-            <a:r>
-              <a:rPr dirty="0"/>
-              <a:t>, </a:t>
-            </a:r>
-            <a:r>
-              <a:rPr dirty="0" err="1"/>
-              <a:t>dérive</a:t>
-            </a:r>
-            <a:r>
-              <a:rPr dirty="0"/>
-              <a:t>)</a:t>
-            </a:r>
-          </a:p>
-          <a:p>
-            <a:r>
-              <a:rPr dirty="0" err="1"/>
-              <a:t>Robustesse</a:t>
-            </a:r>
-            <a:r>
-              <a:rPr dirty="0"/>
-              <a:t>, hallucinations, </a:t>
-            </a:r>
-            <a:r>
-              <a:rPr dirty="0" err="1"/>
-              <a:t>sécurité</a:t>
-            </a:r>
-            <a:r>
-              <a:rPr dirty="0"/>
-              <a:t> (adversarial)</a:t>
-            </a:r>
-          </a:p>
-          <a:p>
-            <a:r>
-              <a:rPr dirty="0" err="1"/>
-              <a:t>Explicabilité</a:t>
-            </a:r>
-            <a:r>
-              <a:rPr dirty="0"/>
-              <a:t>, </a:t>
-            </a:r>
-            <a:r>
-              <a:rPr dirty="0" err="1"/>
-              <a:t>auditabilité</a:t>
-            </a:r>
-            <a:r>
-              <a:rPr dirty="0"/>
-              <a:t>, </a:t>
-            </a:r>
-            <a:r>
-              <a:rPr dirty="0" err="1"/>
-              <a:t>conformité</a:t>
-            </a:r>
-            <a:r>
-              <a:rPr dirty="0"/>
-              <a:t> (RGPD</a:t>
-            </a:r>
-            <a:r>
-              <a:rPr lang="fr-FR" dirty="0"/>
-              <a:t>, AI </a:t>
-            </a:r>
-            <a:r>
-              <a:rPr lang="fr-FR" dirty="0" err="1"/>
-              <a:t>Act</a:t>
-            </a:r>
-            <a:r>
-              <a:rPr dirty="0"/>
-              <a:t>)</a:t>
-            </a:r>
-          </a:p>
-          <a:p>
-            <a:r>
-              <a:rPr dirty="0"/>
-              <a:t>Impact </a:t>
-            </a:r>
-            <a:r>
-              <a:rPr dirty="0" err="1"/>
-              <a:t>environnemental</a:t>
-            </a:r>
-            <a:r>
-              <a:rPr dirty="0"/>
-              <a:t> et </a:t>
-            </a:r>
-            <a:r>
-              <a:rPr dirty="0" err="1"/>
-              <a:t>coûts</a:t>
-            </a:r>
-            <a:endParaRPr dirty="0"/>
-          </a:p>
-          <a:p>
-            <a:r>
-              <a:rPr dirty="0" err="1"/>
-              <a:t>Risques</a:t>
-            </a:r>
-            <a:r>
-              <a:rPr dirty="0"/>
-              <a:t> </a:t>
-            </a:r>
-            <a:r>
-              <a:rPr dirty="0" err="1"/>
-              <a:t>organisationnels</a:t>
-            </a:r>
-            <a:r>
-              <a:rPr dirty="0"/>
-              <a:t> : adoption, </a:t>
-            </a:r>
-            <a:r>
-              <a:rPr dirty="0" err="1"/>
-              <a:t>compétences</a:t>
-            </a:r>
-            <a:r>
-              <a:rPr dirty="0"/>
-              <a:t>, </a:t>
-            </a:r>
-            <a:r>
-              <a:rPr dirty="0" err="1"/>
-              <a:t>éthique</a:t>
-            </a:r>
-            <a:endParaRPr dirty="0"/>
+              <a:t>Vision par ordinateur : détection, OCR, inspection</a:t>
+            </a:r>
+          </a:p>
+          <a:p>
+            <a:r>
+              <a:t>Traitement du langage : résumé, recherche sémantique, assistants</a:t>
+            </a:r>
+          </a:p>
+          <a:p>
+            <a:r>
+              <a:t>Personnalisation &amp; recommandation</a:t>
+            </a:r>
+          </a:p>
+          <a:p>
+            <a:r>
+              <a:t>Optimisation industrielle &amp; maintenance prédictive</a:t>
+            </a:r>
+          </a:p>
+          <a:p>
+            <a:r>
+              <a:t>Aide à la décision &amp; automatisation de processus</a:t>
+            </a:r>
           </a:p>
         </p:txBody>
       </p:sp>
